--- a/Project_Presentation_ppt.pptx
+++ b/Project_Presentation_ppt.pptx
@@ -264,10 +264,6 @@
             <p14:sldId id="284"/>
             <p14:sldId id="285"/>
             <p14:sldId id="279"/>
-          </p14:sldIdLst>
-        </p14:section>
-        <p14:section name="Untitled Section" id="{68ABDF1F-9E68-470E-ACA7-2E73C8C88D8C}">
-          <p14:sldIdLst>
             <p14:sldId id="262"/>
             <p14:sldId id="287"/>
             <p14:sldId id="264"/>
@@ -13541,7 +13537,7 @@
         <p:spPr>
           <a:xfrm>
             <a:off x="576071" y="1234440"/>
-            <a:ext cx="11065323" cy="4832092"/>
+            <a:ext cx="11065323" cy="4616648"/>
           </a:xfrm>
           <a:prstGeom prst="rect">
             <a:avLst/>
@@ -13699,21 +13695,6 @@
             <a:r>
               <a:rPr lang="en-US" dirty="0"/>
               <a:t> – Assist with round-wise cutoff trends, seat availability, and admission strategy.</a:t>
-            </a:r>
-            <a:br>
-              <a:rPr lang="en-US" dirty="0"/>
-            </a:br>
-            <a:r>
-              <a:rPr lang="en-US" dirty="0"/>
-              <a:t>• </a:t>
-            </a:r>
-            <a:r>
-              <a:rPr lang="en-US" b="1" dirty="0"/>
-              <a:t>Multi-Agent System</a:t>
-            </a:r>
-            <a:r>
-              <a:rPr lang="en-US" dirty="0"/>
-              <a:t> –</a:t>
             </a:r>
             <a:br>
               <a:rPr lang="en-US" dirty="0"/>
@@ -13881,7 +13862,7 @@
         <p:spPr>
           <a:xfrm>
             <a:off x="914399" y="1264075"/>
-            <a:ext cx="4876798" cy="1815882"/>
+            <a:ext cx="4876798" cy="1600438"/>
           </a:xfrm>
           <a:prstGeom prst="rect">
             <a:avLst/>
@@ -13974,20 +13955,6 @@
                 </a:solidFill>
               </a:rPr>
               <a:t>RAG (Retrieval-Augmented Generation) </a:t>
-            </a:r>
-          </a:p>
-          <a:p>
-            <a:pPr marL="342900" indent="-342900">
-              <a:buFont typeface="Wingdings" panose="05000000000000000000" pitchFamily="2" charset="2"/>
-              <a:buChar char="Ø"/>
-            </a:pPr>
-            <a:r>
-              <a:rPr lang="en-IN" dirty="0">
-                <a:solidFill>
-                  <a:schemeClr val="tx1"/>
-                </a:solidFill>
-              </a:rPr>
-              <a:t>Vector Database </a:t>
             </a:r>
           </a:p>
           <a:p>
@@ -14377,7 +14344,7 @@
         <p:spPr>
           <a:xfrm>
             <a:off x="576072" y="1234440"/>
-            <a:ext cx="10607040" cy="4401205"/>
+            <a:ext cx="10607040" cy="4616648"/>
           </a:xfrm>
           <a:prstGeom prst="rect">
             <a:avLst/>
@@ -14443,6 +14410,8 @@
               <a:rPr lang="en-US" dirty="0"/>
               <a:t>. This data is embedded and stored in a vector database, enabling the system to retrieve and summarize college details, admission criteria, and fee structures using Granite models.</a:t>
             </a:r>
+          </a:p>
+          <a:p>
             <a:br>
               <a:rPr lang="en-US" dirty="0"/>
             </a:br>
@@ -14912,7 +14881,7 @@
         </p:nvSpPr>
         <p:spPr>
           <a:xfrm>
-            <a:off x="405581" y="212774"/>
+            <a:off x="385917" y="163613"/>
             <a:ext cx="10515600" cy="539441"/>
           </a:xfrm>
         </p:spPr>
@@ -15040,7 +15009,7 @@
         </p:nvSpPr>
         <p:spPr>
           <a:xfrm>
-            <a:off x="621792" y="1167493"/>
+            <a:off x="475488" y="1167493"/>
             <a:ext cx="7406640" cy="3970318"/>
           </a:xfrm>
           <a:prstGeom prst="rect">
